--- a/apisiz/raporlar/2026-10-18-rakip-taramasi/sunum/haftalik-rakip-raporu.pptx
+++ b/apisiz/raporlar/2026-10-18-rakip-taramasi/sunum/haftalik-rakip-raporu.pptx
@@ -3209,7 +3209,7 @@
                   <a:srgbClr val="8A6514"/>
                 </a:solidFill>
               </a:rPr>
-              <a:t>B O L B É</a:t>
+              <a:t>M O T İ F</a:t>
             </a:r>
           </a:p>
         </p:txBody>
@@ -3442,7 +3442,7 @@
                   <a:srgbClr val="5F5C6D"/>
                 </a:solidFill>
               </a:rPr>
-              <a:t>BOLBÉ · Haftalık Rakip Raporu · 11–18 Ekim 2026</a:t>
+              <a:t>MOTİF · Haftalık Rakip Raporu · 11–18 Ekim 2026</a:t>
             </a:r>
           </a:p>
         </p:txBody>
@@ -3682,7 +3682,7 @@
                   <a:srgbClr val="5F5C6D"/>
                 </a:solidFill>
               </a:rPr>
-              <a:t>BOLBÉ · Haftalık Rakip Raporu · 11–18 Ekim 2026</a:t>
+              <a:t>MOTİF · Haftalık Rakip Raporu · 11–18 Ekim 2026</a:t>
             </a:r>
           </a:p>
         </p:txBody>
@@ -4166,7 +4166,7 @@
                   <a:srgbClr val="5F5C6D"/>
                 </a:solidFill>
               </a:rPr>
-              <a:t>BOLBÉ · Haftalık Rakip Raporu · 11–18 Ekim 2026</a:t>
+              <a:t>MOTİF · Haftalık Rakip Raporu · 11–18 Ekim 2026</a:t>
             </a:r>
           </a:p>
         </p:txBody>
@@ -4440,7 +4440,7 @@
                   <a:srgbClr val="5F5C6D"/>
                 </a:solidFill>
               </a:rPr>
-              <a:t>BOLBÉ · Haftalık Rakip Raporu · 11–18 Ekim 2026</a:t>
+              <a:t>MOTİF · Haftalık Rakip Raporu · 11–18 Ekim 2026</a:t>
             </a:r>
           </a:p>
         </p:txBody>
@@ -5351,7 +5351,7 @@
                   <a:srgbClr val="5F5C6D"/>
                 </a:solidFill>
               </a:rPr>
-              <a:t>BOLBÉ · Haftalık Rakip Raporu · 11–18 Ekim 2026</a:t>
+              <a:t>MOTİF · Haftalık Rakip Raporu · 11–18 Ekim 2026</a:t>
             </a:r>
           </a:p>
         </p:txBody>
@@ -5656,7 +5656,7 @@
                   <a:srgbClr val="5F5C6D"/>
                 </a:solidFill>
               </a:rPr>
-              <a:t>BOLBÉ · Haftalık Rakip Raporu · 11–18 Ekim 2026</a:t>
+              <a:t>MOTİF · Haftalık Rakip Raporu · 11–18 Ekim 2026</a:t>
             </a:r>
           </a:p>
         </p:txBody>
@@ -5911,7 +5911,7 @@
                   <a:srgbClr val="5F5C6D"/>
                 </a:solidFill>
               </a:rPr>
-              <a:t>BOLBÉ · Haftalık Rakip Raporu · 11–18 Ekim 2026</a:t>
+              <a:t>MOTİF · Haftalık Rakip Raporu · 11–18 Ekim 2026</a:t>
             </a:r>
           </a:p>
         </p:txBody>
